--- a/output/05-security-privacy/05-01-password-security.pptx
+++ b/output/05-security-privacy/05-01-password-security.pptx
@@ -9432,585 +9432,7 @@
                 </a:solidFill>
                 <a:latin typeface="Segoe UI"/>
               </a:rPr>
-              <a:t>Set the new one as four unrelated words, and store it in the manager.</a:t>
-            </a:r>
-          </a:p>
-        </p:txBody>
-      </p:sp>
-      <p:sp>
-        <p:nvSpPr>
-          <p:cNvPr id="30" name="vis:promptcard"/>
-          <p:cNvSpPr/>
-          <p:nvPr/>
-        </p:nvSpPr>
-        <p:spPr>
-          <a:xfrm>
-            <a:off x="6461607" y="1719072"/>
-            <a:ext cx="5227167" cy="2377947"/>
-          </a:xfrm>
-          <a:prstGeom prst="roundRect">
-            <a:avLst>
-              <a:gd name="adj" fmla="val 3845"/>
-            </a:avLst>
-          </a:prstGeom>
-          <a:solidFill>
-            <a:srgbClr val="101826"/>
-          </a:solidFill>
-          <a:ln>
-            <a:noFill/>
-          </a:ln>
-          <a:effectLst/>
-        </p:spPr>
-        <p:style>
-          <a:lnRef idx="1">
-            <a:schemeClr val="accent1"/>
-          </a:lnRef>
-          <a:fillRef idx="3">
-            <a:schemeClr val="accent1"/>
-          </a:fillRef>
-          <a:effectRef idx="2">
-            <a:schemeClr val="accent1"/>
-          </a:effectRef>
-          <a:fontRef idx="minor">
-            <a:schemeClr val="lt1"/>
-          </a:fontRef>
-        </p:style>
-        <p:txBody>
-          <a:bodyPr rtlCol="0" anchor="ctr" wrap="square"/>
-          <a:lstStyle/>
-          <a:p/>
-        </p:txBody>
-      </p:sp>
-      <p:sp>
-        <p:nvSpPr>
-          <p:cNvPr id="31" name="vis:promptbar"/>
-          <p:cNvSpPr/>
-          <p:nvPr/>
-        </p:nvSpPr>
-        <p:spPr>
-          <a:xfrm>
-            <a:off x="6461607" y="1719072"/>
-            <a:ext cx="5227167" cy="402336"/>
-          </a:xfrm>
-          <a:prstGeom prst="rect">
-            <a:avLst/>
-          </a:prstGeom>
-          <a:solidFill>
-            <a:srgbClr val="2A3547"/>
-          </a:solidFill>
-          <a:ln>
-            <a:noFill/>
-          </a:ln>
-          <a:effectLst/>
-        </p:spPr>
-        <p:style>
-          <a:lnRef idx="1">
-            <a:schemeClr val="accent1"/>
-          </a:lnRef>
-          <a:fillRef idx="3">
-            <a:schemeClr val="accent1"/>
-          </a:fillRef>
-          <a:effectRef idx="2">
-            <a:schemeClr val="accent1"/>
-          </a:effectRef>
-          <a:fontRef idx="minor">
-            <a:schemeClr val="lt1"/>
-          </a:fontRef>
-        </p:style>
-        <p:txBody>
-          <a:bodyPr rtlCol="0" anchor="ctr" wrap="square"/>
-          <a:lstStyle/>
-          <a:p/>
-        </p:txBody>
-      </p:sp>
-      <p:sp>
-        <p:nvSpPr>
-          <p:cNvPr id="32" name="vis:icon"/>
-          <p:cNvSpPr/>
-          <p:nvPr/>
-        </p:nvSpPr>
-        <p:spPr>
-          <a:xfrm>
-            <a:off x="6698620" y="1841235"/>
-            <a:ext cx="184343" cy="122895"/>
-          </a:xfrm>
-          <a:prstGeom prst="roundRect">
-            <a:avLst>
-              <a:gd name="adj" fmla="val 37202"/>
-            </a:avLst>
-          </a:prstGeom>
-          <a:noFill/>
-          <a:ln w="19050">
-            <a:solidFill>
-              <a:srgbClr val="FFFFFF"/>
-            </a:solidFill>
-          </a:ln>
-          <a:effectLst/>
-        </p:spPr>
-        <p:style>
-          <a:lnRef idx="1">
-            <a:schemeClr val="accent1"/>
-          </a:lnRef>
-          <a:fillRef idx="3">
-            <a:schemeClr val="accent1"/>
-          </a:fillRef>
-          <a:effectRef idx="2">
-            <a:schemeClr val="accent1"/>
-          </a:effectRef>
-          <a:fontRef idx="minor">
-            <a:schemeClr val="lt1"/>
-          </a:fontRef>
-        </p:style>
-        <p:txBody>
-          <a:bodyPr rtlCol="0" anchor="ctr" wrap="square"/>
-          <a:lstStyle/>
-          <a:p/>
-        </p:txBody>
-      </p:sp>
-      <p:cxnSp>
-        <p:nvCxnSpPr>
-          <p:cNvPr id="33" name="vis:icon"/>
-          <p:cNvCxnSpPr/>
-          <p:nvPr/>
-        </p:nvCxnSpPr>
-        <p:spPr>
-          <a:xfrm flipH="1">
-            <a:off x="6733733" y="1964131"/>
-            <a:ext cx="8778" cy="48280"/>
-          </a:xfrm>
-          <a:prstGeom prst="line">
-            <a:avLst/>
-          </a:prstGeom>
-          <a:ln w="19050">
-            <a:solidFill>
-              <a:srgbClr val="FFFFFF"/>
-            </a:solidFill>
-          </a:ln>
-          <a:effectLst/>
-        </p:spPr>
-        <p:style>
-          <a:lnRef idx="2">
-            <a:schemeClr val="accent1"/>
-          </a:lnRef>
-          <a:fillRef idx="0">
-            <a:schemeClr val="accent1"/>
-          </a:fillRef>
-          <a:effectRef idx="1">
-            <a:schemeClr val="accent1"/>
-          </a:effectRef>
-          <a:fontRef idx="minor">
-            <a:schemeClr val="tx1"/>
-          </a:fontRef>
-        </p:style>
-      </p:cxnSp>
-      <p:cxnSp>
-        <p:nvCxnSpPr>
-          <p:cNvPr id="34" name="vis:icon"/>
-          <p:cNvCxnSpPr/>
-          <p:nvPr/>
-        </p:nvCxnSpPr>
-        <p:spPr>
-          <a:xfrm flipV="1">
-            <a:off x="6733733" y="1964131"/>
-            <a:ext cx="48280" cy="48280"/>
-          </a:xfrm>
-          <a:prstGeom prst="line">
-            <a:avLst/>
-          </a:prstGeom>
-          <a:ln w="19050">
-            <a:solidFill>
-              <a:srgbClr val="FFFFFF"/>
-            </a:solidFill>
-          </a:ln>
-          <a:effectLst/>
-        </p:spPr>
-        <p:style>
-          <a:lnRef idx="2">
-            <a:schemeClr val="accent1"/>
-          </a:lnRef>
-          <a:fillRef idx="0">
-            <a:schemeClr val="accent1"/>
-          </a:fillRef>
-          <a:effectRef idx="1">
-            <a:schemeClr val="accent1"/>
-          </a:effectRef>
-          <a:fontRef idx="minor">
-            <a:schemeClr val="tx1"/>
-          </a:fontRef>
-        </p:style>
-      </p:cxnSp>
-      <p:sp>
-        <p:nvSpPr>
-          <p:cNvPr id="35" name="vis:copybtn"/>
-          <p:cNvSpPr/>
-          <p:nvPr/>
-        </p:nvSpPr>
-        <p:spPr>
-          <a:xfrm>
-            <a:off x="9828606" y="1792224"/>
-            <a:ext cx="1677289" cy="256032"/>
-          </a:xfrm>
-          <a:prstGeom prst="roundRect">
-            <a:avLst>
-              <a:gd name="adj" fmla="val 17857"/>
-            </a:avLst>
-          </a:prstGeom>
-          <a:solidFill>
-            <a:srgbClr val="7A1220"/>
-          </a:solidFill>
-          <a:ln>
-            <a:noFill/>
-          </a:ln>
-          <a:effectLst/>
-        </p:spPr>
-        <p:style>
-          <a:lnRef idx="1">
-            <a:schemeClr val="accent1"/>
-          </a:lnRef>
-          <a:fillRef idx="3">
-            <a:schemeClr val="accent1"/>
-          </a:fillRef>
-          <a:effectRef idx="2">
-            <a:schemeClr val="accent1"/>
-          </a:effectRef>
-          <a:fontRef idx="minor">
-            <a:schemeClr val="lt1"/>
-          </a:fontRef>
-        </p:style>
-        <p:txBody>
-          <a:bodyPr rtlCol="0" anchor="ctr" wrap="square"/>
-          <a:lstStyle/>
-          <a:p/>
-        </p:txBody>
-      </p:sp>
-      <p:sp>
-        <p:nvSpPr>
-          <p:cNvPr id="36" name="vis:icon"/>
-          <p:cNvSpPr/>
-          <p:nvPr/>
-        </p:nvSpPr>
-        <p:spPr>
-          <a:xfrm>
-            <a:off x="10012217" y="1858060"/>
-            <a:ext cx="80832" cy="130576"/>
-          </a:xfrm>
-          <a:prstGeom prst="roundRect">
-            <a:avLst>
-              <a:gd name="adj" fmla="val 50000"/>
-            </a:avLst>
-          </a:prstGeom>
-          <a:noFill/>
-          <a:ln w="19050">
-            <a:solidFill>
-              <a:srgbClr val="FFFFFF"/>
-            </a:solidFill>
-          </a:ln>
-          <a:effectLst/>
-        </p:spPr>
-        <p:style>
-          <a:lnRef idx="1">
-            <a:schemeClr val="accent1"/>
-          </a:lnRef>
-          <a:fillRef idx="3">
-            <a:schemeClr val="accent1"/>
-          </a:fillRef>
-          <a:effectRef idx="2">
-            <a:schemeClr val="accent1"/>
-          </a:effectRef>
-          <a:fontRef idx="minor">
-            <a:schemeClr val="lt1"/>
-          </a:fontRef>
-        </p:style>
-        <p:txBody>
-          <a:bodyPr rtlCol="0" anchor="ctr" wrap="square"/>
-          <a:lstStyle/>
-          <a:p/>
-        </p:txBody>
-      </p:sp>
-      <p:cxnSp>
-        <p:nvCxnSpPr>
-          <p:cNvPr id="37" name="vis:icon"/>
-          <p:cNvCxnSpPr/>
-          <p:nvPr/>
-        </p:nvCxnSpPr>
-        <p:spPr>
-          <a:xfrm>
-            <a:off x="10030871" y="1895368"/>
-            <a:ext cx="43525" cy="0"/>
-          </a:xfrm>
-          <a:prstGeom prst="line">
-            <a:avLst/>
-          </a:prstGeom>
-          <a:ln w="19050">
-            <a:solidFill>
-              <a:srgbClr val="FFFFFF"/>
-            </a:solidFill>
-          </a:ln>
-          <a:effectLst/>
-        </p:spPr>
-        <p:style>
-          <a:lnRef idx="2">
-            <a:schemeClr val="accent1"/>
-          </a:lnRef>
-          <a:fillRef idx="0">
-            <a:schemeClr val="accent1"/>
-          </a:fillRef>
-          <a:effectRef idx="1">
-            <a:schemeClr val="accent1"/>
-          </a:effectRef>
-          <a:fontRef idx="minor">
-            <a:schemeClr val="tx1"/>
-          </a:fontRef>
-        </p:style>
-      </p:cxnSp>
-      <p:cxnSp>
-        <p:nvCxnSpPr>
-          <p:cNvPr id="38" name="vis:icon"/>
-          <p:cNvCxnSpPr/>
-          <p:nvPr/>
-        </p:nvCxnSpPr>
-        <p:spPr>
-          <a:xfrm>
-            <a:off x="10030871" y="1923348"/>
-            <a:ext cx="43525" cy="0"/>
-          </a:xfrm>
-          <a:prstGeom prst="line">
-            <a:avLst/>
-          </a:prstGeom>
-          <a:ln w="19050">
-            <a:solidFill>
-              <a:srgbClr val="FFFFFF"/>
-            </a:solidFill>
-          </a:ln>
-          <a:effectLst/>
-        </p:spPr>
-        <p:style>
-          <a:lnRef idx="2">
-            <a:schemeClr val="accent1"/>
-          </a:lnRef>
-          <a:fillRef idx="0">
-            <a:schemeClr val="accent1"/>
-          </a:fillRef>
-          <a:effectRef idx="1">
-            <a:schemeClr val="accent1"/>
-          </a:effectRef>
-          <a:fontRef idx="minor">
-            <a:schemeClr val="tx1"/>
-          </a:fontRef>
-        </p:style>
-      </p:cxnSp>
-      <p:cxnSp>
-        <p:nvCxnSpPr>
-          <p:cNvPr id="39" name="vis:icon"/>
-          <p:cNvCxnSpPr/>
-          <p:nvPr/>
-        </p:nvCxnSpPr>
-        <p:spPr>
-          <a:xfrm>
-            <a:off x="10030871" y="1951329"/>
-            <a:ext cx="31090" cy="0"/>
-          </a:xfrm>
-          <a:prstGeom prst="line">
-            <a:avLst/>
-          </a:prstGeom>
-          <a:ln w="19050">
-            <a:solidFill>
-              <a:srgbClr val="FFFFFF"/>
-            </a:solidFill>
-          </a:ln>
-          <a:effectLst/>
-        </p:spPr>
-        <p:style>
-          <a:lnRef idx="2">
-            <a:schemeClr val="accent1"/>
-          </a:lnRef>
-          <a:fillRef idx="0">
-            <a:schemeClr val="accent1"/>
-          </a:fillRef>
-          <a:effectRef idx="1">
-            <a:schemeClr val="accent1"/>
-          </a:effectRef>
-          <a:fontRef idx="minor">
-            <a:schemeClr val="tx1"/>
-          </a:fontRef>
-        </p:style>
-      </p:cxnSp>
-      <p:sp>
-        <p:nvSpPr>
-          <p:cNvPr id="40" name="vis:copytext"/>
-          <p:cNvSpPr txBox="1"/>
-          <p:nvPr/>
-        </p:nvSpPr>
-        <p:spPr>
-          <a:xfrm>
-            <a:off x="10240086" y="1851660"/>
-            <a:ext cx="1064641" cy="201168"/>
-          </a:xfrm>
-          <a:prstGeom prst="rect">
-            <a:avLst/>
-          </a:prstGeom>
-          <a:noFill/>
-        </p:spPr>
-        <p:txBody>
-          <a:bodyPr wrap="square" lIns="0" rIns="0" tIns="0" bIns="0" anchor="t">
-            <a:spAutoFit/>
-          </a:bodyPr>
-          <a:lstStyle/>
-          <a:p>
-            <a:pPr algn="l">
-              <a:lnSpc>
-                <a:spcPts val="1560"/>
-              </a:lnSpc>
-              <a:spcBef>
-                <a:spcPts val="0"/>
-              </a:spcBef>
-              <a:spcAft>
-                <a:spcPts val="0"/>
-              </a:spcAft>
-            </a:pPr>
-            <a:r>
-              <a:rPr sz="1200" b="0">
-                <a:solidFill>
-                  <a:srgbClr val="FFFFFF"/>
-                </a:solidFill>
-                <a:latin typeface="Segoe UI Semibold"/>
-              </a:rPr>
-              <a:t>Select + copy</a:t>
-            </a:r>
-          </a:p>
-        </p:txBody>
-      </p:sp>
-      <p:sp>
-        <p:nvSpPr>
-          <p:cNvPr id="41" name="vis:prompthdr"/>
-          <p:cNvSpPr txBox="1"/>
-          <p:nvPr/>
-        </p:nvSpPr>
-        <p:spPr>
-          <a:xfrm>
-            <a:off x="7010247" y="1828800"/>
-            <a:ext cx="2708630" cy="201168"/>
-          </a:xfrm>
-          <a:prstGeom prst="rect">
-            <a:avLst/>
-          </a:prstGeom>
-          <a:noFill/>
-        </p:spPr>
-        <p:txBody>
-          <a:bodyPr wrap="square" lIns="0" rIns="0" tIns="0" bIns="0" anchor="t">
-            <a:spAutoFit/>
-          </a:bodyPr>
-          <a:lstStyle/>
-          <a:p>
-            <a:pPr algn="l">
-              <a:lnSpc>
-                <a:spcPts val="1560"/>
-              </a:lnSpc>
-              <a:spcBef>
-                <a:spcPts val="0"/>
-              </a:spcBef>
-              <a:spcAft>
-                <a:spcPts val="0"/>
-              </a:spcAft>
-            </a:pPr>
-            <a:r>
-              <a:rPr sz="1200" b="0" spc="60">
-                <a:solidFill>
-                  <a:srgbClr val="FFFFFF"/>
-                </a:solidFill>
-                <a:latin typeface="Segoe UI Semibold"/>
-              </a:rPr>
-              <a:t>Copy this prompt</a:t>
-            </a:r>
-          </a:p>
-        </p:txBody>
-      </p:sp>
-      <p:sp>
-        <p:nvSpPr>
-          <p:cNvPr id="42" name="card:prompt"/>
-          <p:cNvSpPr txBox="1"/>
-          <p:nvPr/>
-        </p:nvSpPr>
-        <p:spPr>
-          <a:xfrm>
-            <a:off x="6735927" y="2267712"/>
-            <a:ext cx="4678527" cy="1155699"/>
-          </a:xfrm>
-          <a:prstGeom prst="rect">
-            <a:avLst/>
-          </a:prstGeom>
-          <a:noFill/>
-        </p:spPr>
-        <p:txBody>
-          <a:bodyPr wrap="square" lIns="0" rIns="0" tIns="0" bIns="0" anchor="t">
-            <a:spAutoFit/>
-          </a:bodyPr>
-          <a:lstStyle/>
-          <a:p>
-            <a:pPr algn="l">
-              <a:lnSpc>
-                <a:spcPts val="1755"/>
-              </a:lnSpc>
-              <a:spcBef>
-                <a:spcPts val="0"/>
-              </a:spcBef>
-              <a:spcAft>
-                <a:spcPts val="0"/>
-              </a:spcAft>
-            </a:pPr>
-            <a:r>
-              <a:rPr sz="1350" b="0">
-                <a:solidFill>
-                  <a:srgbClr val="FFFFFF"/>
-                </a:solidFill>
-                <a:latin typeface="Consolas"/>
-              </a:rPr>
-              <a:t>Give me eight passphrases, each four unrelated common English words joined by hyphens. No names, no places, no dates, no themes connecting the words. Numbered list, nothing else.</a:t>
-            </a:r>
-          </a:p>
-        </p:txBody>
-      </p:sp>
-      <p:sp>
-        <p:nvSpPr>
-          <p:cNvPr id="43" name="vis:promptcap"/>
-          <p:cNvSpPr txBox="1"/>
-          <p:nvPr/>
-        </p:nvSpPr>
-        <p:spPr>
-          <a:xfrm>
-            <a:off x="6735927" y="3624579"/>
-            <a:ext cx="4678527" cy="252984"/>
-          </a:xfrm>
-          <a:prstGeom prst="rect">
-            <a:avLst/>
-          </a:prstGeom>
-          <a:noFill/>
-        </p:spPr>
-        <p:txBody>
-          <a:bodyPr wrap="square" lIns="0" rIns="0" tIns="0" bIns="0" anchor="t">
-            <a:spAutoFit/>
-          </a:bodyPr>
-          <a:lstStyle/>
-          <a:p>
-            <a:pPr algn="l">
-              <a:lnSpc>
-                <a:spcPts val="1560"/>
-              </a:lnSpc>
-              <a:spcBef>
-                <a:spcPts val="0"/>
-              </a:spcBef>
-              <a:spcAft>
-                <a:spcPts val="0"/>
-              </a:spcAft>
-            </a:pPr>
-            <a:r>
-              <a:rPr sz="1200" b="0">
-                <a:solidFill>
-                  <a:srgbClr val="C9D1DE"/>
-                </a:solidFill>
-                <a:latin typeface="Segoe UI"/>
-              </a:rPr>
-              <a:t>Pick one you like the sound of. Never reuse one shown to anybody.</a:t>
+              <a:t>Set the new one as four unrelated words, generated by your password manager's own generator, not typed by you and never asked of an AI tool.</a:t>
             </a:r>
           </a:p>
         </p:txBody>

--- a/output/05-security-privacy/05-01-password-security.pptx
+++ b/output/05-security-privacy/05-01-password-security.pptx
@@ -25788,7 +25788,7 @@
                 </a:solidFill>
                 <a:latin typeface="Segoe UI"/>
               </a:rPr>
-              <a:t>Almost never. Guessing is slow, usually blocked after a few attempts, and unnecessary when millions of real passwords are already available in leaked lists.</a:t>
+              <a:t>Guessing is slow, is usually blocked after a few failed attempts, and is unnecessary once millions of real passwords are already sitting in leaked lists.</a:t>
             </a:r>
           </a:p>
         </p:txBody>
@@ -26695,7 +26695,7 @@
                 </a:solidFill>
                 <a:latin typeface="Segoe UI"/>
               </a:rPr>
-              <a:t>This is the standard attack. Your email and password from a breached site are tried automatically against hundreds of services. If you reused it, one of them works.</a:t>
+              <a:t>This is one of the most common ways accounts are actually taken. Your email and password from a breached site are tried automatically against hundreds of services. If you reused it, one of them works.</a:t>
             </a:r>
           </a:p>
         </p:txBody>
@@ -27602,7 +27602,7 @@
                 </a:solidFill>
                 <a:latin typeface="Segoe UI"/>
               </a:rPr>
-              <a:t>Length matters against guessing, which is rarely how it happens. A twenty-character password that leaked is just as usable to an attacker as a short one.</a:t>
+              <a:t>Length matters against guessing, which is not how most real takeovers happen. A twenty-character password that leaked is just as usable to an attacker as a short one.</a:t>
             </a:r>
           </a:p>
         </p:txBody>
@@ -28509,7 +28509,7 @@
                 </a:solidFill>
                 <a:latin typeface="Segoe UI"/>
               </a:rPr>
-              <a:t>It happens, and it is a tiny fraction of cases. The overwhelming majority need nobody anywhere near your desk.</a:t>
+              <a:t>It happens, and it needs the attacker physically near you — a real limit that credential stuffing from a leaked list does not have.</a:t>
             </a:r>
           </a:p>
         </p:txBody>
@@ -57783,7 +57783,7 @@
                 </a:solidFill>
                 <a:latin typeface="Segoe UI Semibold"/>
               </a:rPr>
-              <a:t>The passphrase generator prompt</a:t>
+              <a:t>The generate-and-store habit</a:t>
             </a:r>
           </a:p>
         </p:txBody>
@@ -57828,7 +57828,7 @@
                 </a:solidFill>
                 <a:latin typeface="Segoe UI"/>
               </a:rPr>
-              <a:t>Eight four-word phrases, no names, no dates.</a:t>
+              <a:t>Your password manager's own generator — never an AI tool.</a:t>
             </a:r>
           </a:p>
         </p:txBody>
